--- a/icons.pptx
+++ b/icons.pptx
@@ -104,6 +104,11 @@
       </a:defRPr>
     </a:lvl9pPr>
   </p:defaultTextStyle>
+  <p:extLst>
+    <p:ext uri="{EFAFB233-063F-42B5-8137-9DF3F51BA10A}">
+      <p15:sldGuideLst xmlns:p15="http://schemas.microsoft.com/office/powerpoint/2012/main"/>
+    </p:ext>
+  </p:extLst>
 </p:presentation>
 </file>
 
@@ -256,7 +261,7 @@
           <a:p>
             <a:fld id="{9526F847-DEFA-A54A-990C-E2B6DB524CCD}" type="datetimeFigureOut">
               <a:rPr lang="en-US" smtClean="0"/>
-              <a:t>7/6/21</a:t>
+              <a:t>7/11/21</a:t>
             </a:fld>
             <a:endParaRPr lang="en-US"/>
           </a:p>
@@ -456,7 +461,7 @@
           <a:p>
             <a:fld id="{9526F847-DEFA-A54A-990C-E2B6DB524CCD}" type="datetimeFigureOut">
               <a:rPr lang="en-US" smtClean="0"/>
-              <a:t>7/6/21</a:t>
+              <a:t>7/11/21</a:t>
             </a:fld>
             <a:endParaRPr lang="en-US"/>
           </a:p>
@@ -666,7 +671,7 @@
           <a:p>
             <a:fld id="{9526F847-DEFA-A54A-990C-E2B6DB524CCD}" type="datetimeFigureOut">
               <a:rPr lang="en-US" smtClean="0"/>
-              <a:t>7/6/21</a:t>
+              <a:t>7/11/21</a:t>
             </a:fld>
             <a:endParaRPr lang="en-US"/>
           </a:p>
@@ -866,7 +871,7 @@
           <a:p>
             <a:fld id="{9526F847-DEFA-A54A-990C-E2B6DB524CCD}" type="datetimeFigureOut">
               <a:rPr lang="en-US" smtClean="0"/>
-              <a:t>7/6/21</a:t>
+              <a:t>7/11/21</a:t>
             </a:fld>
             <a:endParaRPr lang="en-US"/>
           </a:p>
@@ -1142,7 +1147,7 @@
           <a:p>
             <a:fld id="{9526F847-DEFA-A54A-990C-E2B6DB524CCD}" type="datetimeFigureOut">
               <a:rPr lang="en-US" smtClean="0"/>
-              <a:t>7/6/21</a:t>
+              <a:t>7/11/21</a:t>
             </a:fld>
             <a:endParaRPr lang="en-US"/>
           </a:p>
@@ -1410,7 +1415,7 @@
           <a:p>
             <a:fld id="{9526F847-DEFA-A54A-990C-E2B6DB524CCD}" type="datetimeFigureOut">
               <a:rPr lang="en-US" smtClean="0"/>
-              <a:t>7/6/21</a:t>
+              <a:t>7/11/21</a:t>
             </a:fld>
             <a:endParaRPr lang="en-US"/>
           </a:p>
@@ -1825,7 +1830,7 @@
           <a:p>
             <a:fld id="{9526F847-DEFA-A54A-990C-E2B6DB524CCD}" type="datetimeFigureOut">
               <a:rPr lang="en-US" smtClean="0"/>
-              <a:t>7/6/21</a:t>
+              <a:t>7/11/21</a:t>
             </a:fld>
             <a:endParaRPr lang="en-US"/>
           </a:p>
@@ -1967,7 +1972,7 @@
           <a:p>
             <a:fld id="{9526F847-DEFA-A54A-990C-E2B6DB524CCD}" type="datetimeFigureOut">
               <a:rPr lang="en-US" smtClean="0"/>
-              <a:t>7/6/21</a:t>
+              <a:t>7/11/21</a:t>
             </a:fld>
             <a:endParaRPr lang="en-US"/>
           </a:p>
@@ -2080,7 +2085,7 @@
           <a:p>
             <a:fld id="{9526F847-DEFA-A54A-990C-E2B6DB524CCD}" type="datetimeFigureOut">
               <a:rPr lang="en-US" smtClean="0"/>
-              <a:t>7/6/21</a:t>
+              <a:t>7/11/21</a:t>
             </a:fld>
             <a:endParaRPr lang="en-US"/>
           </a:p>
@@ -2393,7 +2398,7 @@
           <a:p>
             <a:fld id="{9526F847-DEFA-A54A-990C-E2B6DB524CCD}" type="datetimeFigureOut">
               <a:rPr lang="en-US" smtClean="0"/>
-              <a:t>7/6/21</a:t>
+              <a:t>7/11/21</a:t>
             </a:fld>
             <a:endParaRPr lang="en-US"/>
           </a:p>
@@ -2682,7 +2687,7 @@
           <a:p>
             <a:fld id="{9526F847-DEFA-A54A-990C-E2B6DB524CCD}" type="datetimeFigureOut">
               <a:rPr lang="en-US" smtClean="0"/>
-              <a:t>7/6/21</a:t>
+              <a:t>7/11/21</a:t>
             </a:fld>
             <a:endParaRPr lang="en-US"/>
           </a:p>
@@ -2925,7 +2930,7 @@
           <a:p>
             <a:fld id="{9526F847-DEFA-A54A-990C-E2B6DB524CCD}" type="datetimeFigureOut">
               <a:rPr lang="en-US" smtClean="0"/>
-              <a:t>7/6/21</a:t>
+              <a:t>7/11/21</a:t>
             </a:fld>
             <a:endParaRPr lang="en-US"/>
           </a:p>
@@ -3392,111 +3397,96 @@
           </a:p>
         </p:txBody>
       </p:sp>
-      <p:grpSp>
-        <p:nvGrpSpPr>
-          <p:cNvPr id="43" name="Group 42">
-            <a:extLst>
-              <a:ext uri="{FF2B5EF4-FFF2-40B4-BE49-F238E27FC236}">
-                <a16:creationId xmlns:a16="http://schemas.microsoft.com/office/drawing/2014/main" id="{1D7D554B-309F-C440-9EC2-A868740727AA}"/>
-              </a:ext>
-            </a:extLst>
-          </p:cNvPr>
-          <p:cNvGrpSpPr/>
+      <p:sp>
+        <p:nvSpPr>
+          <p:cNvPr id="4" name="Oval 3">
+            <a:extLst>
+              <a:ext uri="{FF2B5EF4-FFF2-40B4-BE49-F238E27FC236}">
+                <a16:creationId xmlns:a16="http://schemas.microsoft.com/office/drawing/2014/main" id="{DE2A6FC6-8CE4-A543-980D-40CE4CA24CE1}"/>
+              </a:ext>
+            </a:extLst>
+          </p:cNvPr>
+          <p:cNvSpPr>
+            <a:spLocks noChangeAspect="1"/>
+          </p:cNvSpPr>
           <p:nvPr/>
-        </p:nvGrpSpPr>
-        <p:grpSpPr>
+        </p:nvSpPr>
+        <p:spPr>
           <a:xfrm>
             <a:off x="-5649433" y="1041399"/>
             <a:ext cx="4829175" cy="4829175"/>
-            <a:chOff x="-5649433" y="1041399"/>
-            <a:chExt cx="4829175" cy="4829175"/>
           </a:xfrm>
-        </p:grpSpPr>
-        <p:sp>
-          <p:nvSpPr>
-            <p:cNvPr id="4" name="Oval 3">
-              <a:extLst>
-                <a:ext uri="{FF2B5EF4-FFF2-40B4-BE49-F238E27FC236}">
-                  <a16:creationId xmlns:a16="http://schemas.microsoft.com/office/drawing/2014/main" id="{DE2A6FC6-8CE4-A543-980D-40CE4CA24CE1}"/>
-                </a:ext>
-              </a:extLst>
-            </p:cNvPr>
-            <p:cNvSpPr>
-              <a:spLocks noChangeAspect="1"/>
-            </p:cNvSpPr>
-            <p:nvPr/>
-          </p:nvSpPr>
-          <p:spPr>
-            <a:xfrm>
-              <a:off x="-5649433" y="1041399"/>
-              <a:ext cx="4829175" cy="4829175"/>
-            </a:xfrm>
-            <a:prstGeom prst="ellipse">
-              <a:avLst/>
-            </a:prstGeom>
-            <a:solidFill>
-              <a:schemeClr val="bg1"/>
-            </a:solidFill>
-            <a:ln>
-              <a:noFill/>
-            </a:ln>
-          </p:spPr>
-          <p:style>
-            <a:lnRef idx="2">
-              <a:schemeClr val="accent1">
-                <a:shade val="50000"/>
-              </a:schemeClr>
-            </a:lnRef>
-            <a:fillRef idx="1">
-              <a:schemeClr val="accent1"/>
-            </a:fillRef>
-            <a:effectRef idx="0">
-              <a:schemeClr val="accent1"/>
-            </a:effectRef>
-            <a:fontRef idx="minor">
-              <a:schemeClr val="lt1"/>
-            </a:fontRef>
-          </p:style>
-          <p:txBody>
-            <a:bodyPr rtlCol="0" anchor="ctr"/>
-            <a:lstStyle/>
-            <a:p>
-              <a:pPr algn="ctr"/>
-              <a:endParaRPr lang="en-US" dirty="0"/>
-            </a:p>
-          </p:txBody>
-        </p:sp>
-        <p:pic>
-          <p:nvPicPr>
-            <p:cNvPr id="42" name="Picture 41" descr="Logo, company name&#10;&#10;Description automatically generated">
-              <a:extLst>
-                <a:ext uri="{FF2B5EF4-FFF2-40B4-BE49-F238E27FC236}">
-                  <a16:creationId xmlns:a16="http://schemas.microsoft.com/office/drawing/2014/main" id="{D5EF9B16-C155-2142-A04A-B033AD955344}"/>
-                </a:ext>
-              </a:extLst>
-            </p:cNvPr>
-            <p:cNvPicPr>
-              <a:picLocks noChangeAspect="1"/>
-            </p:cNvPicPr>
-            <p:nvPr/>
-          </p:nvPicPr>
-          <p:blipFill>
-            <a:blip r:embed="rId2"/>
-            <a:stretch>
-              <a:fillRect/>
-            </a:stretch>
-          </p:blipFill>
-          <p:spPr>
-            <a:xfrm>
-              <a:off x="-4790282" y="1814909"/>
-              <a:ext cx="3228181" cy="3228181"/>
-            </a:xfrm>
-            <a:prstGeom prst="rect">
-              <a:avLst/>
-            </a:prstGeom>
-          </p:spPr>
-        </p:pic>
-      </p:grpSp>
+          <a:prstGeom prst="ellipse">
+            <a:avLst/>
+          </a:prstGeom>
+          <a:solidFill>
+            <a:schemeClr val="bg1"/>
+          </a:solidFill>
+          <a:ln>
+            <a:noFill/>
+          </a:ln>
+        </p:spPr>
+        <p:style>
+          <a:lnRef idx="2">
+            <a:schemeClr val="accent1">
+              <a:shade val="50000"/>
+            </a:schemeClr>
+          </a:lnRef>
+          <a:fillRef idx="1">
+            <a:schemeClr val="accent1"/>
+          </a:fillRef>
+          <a:effectRef idx="0">
+            <a:schemeClr val="accent1"/>
+          </a:effectRef>
+          <a:fontRef idx="minor">
+            <a:schemeClr val="lt1"/>
+          </a:fontRef>
+        </p:style>
+        <p:txBody>
+          <a:bodyPr rtlCol="0" anchor="ctr"/>
+          <a:lstStyle/>
+          <a:p>
+            <a:pPr algn="ctr"/>
+            <a:endParaRPr lang="en-US" dirty="0"/>
+          </a:p>
+        </p:txBody>
+      </p:sp>
+      <p:pic>
+        <p:nvPicPr>
+          <p:cNvPr id="6" name="Graphic 5">
+            <a:extLst>
+              <a:ext uri="{FF2B5EF4-FFF2-40B4-BE49-F238E27FC236}">
+                <a16:creationId xmlns:a16="http://schemas.microsoft.com/office/drawing/2014/main" id="{331D2382-C1A6-104A-A4FC-6F7F5DF43853}"/>
+              </a:ext>
+            </a:extLst>
+          </p:cNvPr>
+          <p:cNvPicPr>
+            <a:picLocks noChangeAspect="1"/>
+          </p:cNvPicPr>
+          <p:nvPr/>
+        </p:nvPicPr>
+        <p:blipFill>
+          <a:blip r:embed="rId2">
+            <a:extLst>
+              <a:ext uri="{96DAC541-7B7A-43D3-8B79-37D633B846F1}">
+                <asvg:svgBlip xmlns:asvg="http://schemas.microsoft.com/office/drawing/2016/SVG/main" r:embed="rId3"/>
+              </a:ext>
+            </a:extLst>
+          </a:blip>
+          <a:stretch>
+            <a:fillRect/>
+          </a:stretch>
+        </p:blipFill>
+        <p:spPr>
+          <a:xfrm flipH="1">
+            <a:off x="-4567826" y="2316162"/>
+            <a:ext cx="2789129" cy="2231303"/>
+          </a:xfrm>
+          <a:prstGeom prst="rect">
+            <a:avLst/>
+          </a:prstGeom>
+        </p:spPr>
+      </p:pic>
     </p:spTree>
     <p:extLst>
       <p:ext uri="{BB962C8B-B14F-4D97-AF65-F5344CB8AC3E}">
